--- a/dist/초5/사회·역사/권리와생활/초5_사회·역사_권리와생활_01_인권.pptx
+++ b/dist/초5/사회·역사/권리와생활/초5_사회·역사_권리와생활_01_인권.pptx
@@ -120,20 +120,20 @@
   <p:extLst>
     <p:ext uri="{521415D9-36F7-43E2-AB2F-B90AF26B5E84}">
       <p14:sectionLst xmlns:p14="http://schemas.microsoft.com/office/powerpoint/2010/main">
-        <p14:section name="도입" id="{5d1e67db-179b-ce14-c787-7763cdd09740}">
+        <p14:section name="도입" id="{799eb230-a61b-5627-399c-a08a5b330d29}">
           <p14:sldIdLst>
             <p14:sldId id="256"/>
             <p14:sldId id="257"/>
           </p14:sldIdLst>
         </p14:section>
-        <p14:section name="개념" id="{6abfa874-11b6-560c-121e-434fb9e976e3}">
+        <p14:section name="개념" id="{3a132dcb-04b0-c6bc-f443-575f6b040347}">
           <p14:sldIdLst>
             <p14:sldId id="258"/>
             <p14:sldId id="259"/>
             <p14:sldId id="262"/>
           </p14:sldIdLst>
         </p14:section>
-        <p14:section name="연습" id="{d6b28757-9041-bfc7-1c3e-f3a591191838}">
+        <p14:section name="연습" id="{08545dc1-e4b5-6379-8d02-e6c167c21253}">
           <p14:sldIdLst>
             <p14:sldId id="260"/>
             <p14:sldId id="261"/>
@@ -141,25 +141,25 @@
             <p14:sldId id="264"/>
           </p14:sldIdLst>
         </p14:section>
-        <p14:section name="개념" id="{9e5748d3-8d3e-9962-0051-22ffe4cabfac}">
+        <p14:section name="개념" id="{730960de-d780-2094-3ad0-bae9ec78e23f}">
           <p14:sldIdLst/>
         </p14:section>
-        <p14:section name="연습" id="{41726548-0c40-e597-7c8f-65837741fad7}">
+        <p14:section name="연습" id="{dda8e24c-4861-1576-5f1d-7a4f345b8d38}">
           <p14:sldIdLst/>
         </p14:section>
-        <p14:section name="확인" id="{b36c6128-69f6-e493-5670-243814dbd73a}">
+        <p14:section name="확인" id="{ad39305b-59aa-424b-fa89-76f68e5095d9}">
           <p14:sldIdLst>
             <p14:sldId id="265"/>
             <p14:sldId id="266"/>
             <p14:sldId id="267"/>
           </p14:sldIdLst>
         </p14:section>
-        <p14:section name="정리" id="{591e1160-6795-051b-ddc3-a5c9b3ea1461}">
+        <p14:section name="정리" id="{ead8b5ad-3d1b-a445-62b3-3fdfa1c048ab}">
           <p14:sldIdLst>
             <p14:sldId id="268"/>
           </p14:sldIdLst>
         </p14:section>
-        <p14:section name="보충" id="{37b2d853-545d-839b-1f1c-b4c1966c54f2}">
+        <p14:section name="보충" id="{98beceb6-fdcd-1195-9c31-fb7f9aaf6091}">
           <p14:sldIdLst>
             <p14:sldId id="269"/>
           </p14:sldIdLst>
@@ -1082,7 +1082,7 @@
 막히면
 - 가족 각자가 집에서 누리는 권리(쉴 권리, 내 물건을 지킬 권리)를 하나씩 말해 봅니다.
 주의
-- 이 차시는 계획상 바로 앞의 선수 차시가 없습니다. 다른 사람을 존중하는 태도가 많이 흔들리면 3학년 ‘다양한 가족’(KR22-G03-SOC-FAMILIES-L01)과 4학년 도덕 ‘대화로 갈등 해결’(KR22-G04-ETH-CONFLICT-L01)을 함께 봅니다.
+- 다른 사람을 존중하는 태도가 많이 흔들리면 앞 차시인 3학년 ‘다양한 가족’(KR22-G03-SOC-FAMILIES-L01)과 4학년 도덕 ‘대화로 갈등 해결’(KR22-G04-ETH-CONFLICT-L01)을 함께 봅니다.
 - 보충이 오래 걸리면 오늘은 여기까지 하고 다음 날 S02부터 다시 시작합니다.</a:t>
             </a:r>
             <a:endParaRPr lang="en-US" dirty="0"/>
